--- a/Road_Accident_Analysis.pptx
+++ b/Road_Accident_Analysis.pptx
@@ -171,10 +171,9 @@
           <a:lstStyle/>
           <a:p>
             <a:r>
-              <a:rPr lang="en-US" smtClean="0"/>
+              <a:rPr lang="en-US"/>
               <a:t>Click to edit Master title style</a:t>
             </a:r>
-            <a:endParaRPr lang="en-US"/>
           </a:p>
         </p:txBody>
       </p:sp>
@@ -290,10 +289,9 @@
           </a:lstStyle>
           <a:p>
             <a:r>
-              <a:rPr lang="en-US" smtClean="0"/>
+              <a:rPr lang="en-US"/>
               <a:t>Click to edit Master subtitle style</a:t>
             </a:r>
-            <a:endParaRPr lang="en-US"/>
           </a:p>
         </p:txBody>
       </p:sp>
@@ -408,10 +406,9 @@
           <a:lstStyle/>
           <a:p>
             <a:r>
-              <a:rPr lang="en-US" smtClean="0"/>
+              <a:rPr lang="en-US"/>
               <a:t>Click to edit Master title style</a:t>
             </a:r>
-            <a:endParaRPr lang="en-US"/>
           </a:p>
         </p:txBody>
       </p:sp>
@@ -432,38 +429,37 @@
           <a:p>
             <a:pPr lvl="0"/>
             <a:r>
-              <a:rPr lang="en-US" smtClean="0"/>
+              <a:rPr lang="en-US"/>
               <a:t>Click to edit Master text styles</a:t>
             </a:r>
           </a:p>
           <a:p>
             <a:pPr lvl="1"/>
             <a:r>
-              <a:rPr lang="en-US" smtClean="0"/>
+              <a:rPr lang="en-US"/>
               <a:t>Second level</a:t>
             </a:r>
           </a:p>
           <a:p>
             <a:pPr lvl="2"/>
             <a:r>
-              <a:rPr lang="en-US" smtClean="0"/>
+              <a:rPr lang="en-US"/>
               <a:t>Third level</a:t>
             </a:r>
           </a:p>
           <a:p>
             <a:pPr lvl="3"/>
             <a:r>
-              <a:rPr lang="en-US" smtClean="0"/>
+              <a:rPr lang="en-US"/>
               <a:t>Fourth level</a:t>
             </a:r>
           </a:p>
           <a:p>
             <a:pPr lvl="4"/>
             <a:r>
-              <a:rPr lang="en-US" smtClean="0"/>
+              <a:rPr lang="en-US"/>
               <a:t>Fifth level</a:t>
             </a:r>
-            <a:endParaRPr lang="en-US"/>
           </a:p>
         </p:txBody>
       </p:sp>
@@ -583,10 +579,9 @@
           <a:lstStyle/>
           <a:p>
             <a:r>
-              <a:rPr lang="en-US" smtClean="0"/>
+              <a:rPr lang="en-US"/>
               <a:t>Click to edit Master title style</a:t>
             </a:r>
-            <a:endParaRPr lang="en-US"/>
           </a:p>
         </p:txBody>
       </p:sp>
@@ -612,38 +607,37 @@
           <a:p>
             <a:pPr lvl="0"/>
             <a:r>
-              <a:rPr lang="en-US" smtClean="0"/>
+              <a:rPr lang="en-US"/>
               <a:t>Click to edit Master text styles</a:t>
             </a:r>
           </a:p>
           <a:p>
             <a:pPr lvl="1"/>
             <a:r>
-              <a:rPr lang="en-US" smtClean="0"/>
+              <a:rPr lang="en-US"/>
               <a:t>Second level</a:t>
             </a:r>
           </a:p>
           <a:p>
             <a:pPr lvl="2"/>
             <a:r>
-              <a:rPr lang="en-US" smtClean="0"/>
+              <a:rPr lang="en-US"/>
               <a:t>Third level</a:t>
             </a:r>
           </a:p>
           <a:p>
             <a:pPr lvl="3"/>
             <a:r>
-              <a:rPr lang="en-US" smtClean="0"/>
+              <a:rPr lang="en-US"/>
               <a:t>Fourth level</a:t>
             </a:r>
           </a:p>
           <a:p>
             <a:pPr lvl="4"/>
             <a:r>
-              <a:rPr lang="en-US" smtClean="0"/>
+              <a:rPr lang="en-US"/>
               <a:t>Fifth level</a:t>
             </a:r>
-            <a:endParaRPr lang="en-US"/>
           </a:p>
         </p:txBody>
       </p:sp>
@@ -758,10 +752,9 @@
           <a:lstStyle/>
           <a:p>
             <a:r>
-              <a:rPr lang="en-US" smtClean="0"/>
+              <a:rPr lang="en-US"/>
               <a:t>Click to edit Master title style</a:t>
             </a:r>
-            <a:endParaRPr lang="en-US"/>
           </a:p>
         </p:txBody>
       </p:sp>
@@ -782,38 +775,37 @@
           <a:p>
             <a:pPr lvl="0"/>
             <a:r>
-              <a:rPr lang="en-US" smtClean="0"/>
+              <a:rPr lang="en-US"/>
               <a:t>Click to edit Master text styles</a:t>
             </a:r>
           </a:p>
           <a:p>
             <a:pPr lvl="1"/>
             <a:r>
-              <a:rPr lang="en-US" smtClean="0"/>
+              <a:rPr lang="en-US"/>
               <a:t>Second level</a:t>
             </a:r>
           </a:p>
           <a:p>
             <a:pPr lvl="2"/>
             <a:r>
-              <a:rPr lang="en-US" smtClean="0"/>
+              <a:rPr lang="en-US"/>
               <a:t>Third level</a:t>
             </a:r>
           </a:p>
           <a:p>
             <a:pPr lvl="3"/>
             <a:r>
-              <a:rPr lang="en-US" smtClean="0"/>
+              <a:rPr lang="en-US"/>
               <a:t>Fourth level</a:t>
             </a:r>
           </a:p>
           <a:p>
             <a:pPr lvl="4"/>
             <a:r>
-              <a:rPr lang="en-US" smtClean="0"/>
+              <a:rPr lang="en-US"/>
               <a:t>Fifth level</a:t>
             </a:r>
-            <a:endParaRPr lang="en-US"/>
           </a:p>
         </p:txBody>
       </p:sp>
@@ -937,10 +929,9 @@
           </a:lstStyle>
           <a:p>
             <a:r>
-              <a:rPr lang="en-US" smtClean="0"/>
+              <a:rPr lang="en-US"/>
               <a:t>Click to edit Master title style</a:t>
             </a:r>
-            <a:endParaRPr lang="en-US"/>
           </a:p>
         </p:txBody>
       </p:sp>
@@ -1057,7 +1048,7 @@
           <a:p>
             <a:pPr lvl="0"/>
             <a:r>
-              <a:rPr lang="en-US" smtClean="0"/>
+              <a:rPr lang="en-US"/>
               <a:t>Click to edit Master text styles</a:t>
             </a:r>
           </a:p>
@@ -1174,10 +1165,9 @@
           <a:lstStyle/>
           <a:p>
             <a:r>
-              <a:rPr lang="en-US" smtClean="0"/>
+              <a:rPr lang="en-US"/>
               <a:t>Click to edit Master title style</a:t>
             </a:r>
-            <a:endParaRPr lang="en-US"/>
           </a:p>
         </p:txBody>
       </p:sp>
@@ -1231,38 +1221,37 @@
           <a:p>
             <a:pPr lvl="0"/>
             <a:r>
-              <a:rPr lang="en-US" smtClean="0"/>
+              <a:rPr lang="en-US"/>
               <a:t>Click to edit Master text styles</a:t>
             </a:r>
           </a:p>
           <a:p>
             <a:pPr lvl="1"/>
             <a:r>
-              <a:rPr lang="en-US" smtClean="0"/>
+              <a:rPr lang="en-US"/>
               <a:t>Second level</a:t>
             </a:r>
           </a:p>
           <a:p>
             <a:pPr lvl="2"/>
             <a:r>
-              <a:rPr lang="en-US" smtClean="0"/>
+              <a:rPr lang="en-US"/>
               <a:t>Third level</a:t>
             </a:r>
           </a:p>
           <a:p>
             <a:pPr lvl="3"/>
             <a:r>
-              <a:rPr lang="en-US" smtClean="0"/>
+              <a:rPr lang="en-US"/>
               <a:t>Fourth level</a:t>
             </a:r>
           </a:p>
           <a:p>
             <a:pPr lvl="4"/>
             <a:r>
-              <a:rPr lang="en-US" smtClean="0"/>
+              <a:rPr lang="en-US"/>
               <a:t>Fifth level</a:t>
             </a:r>
-            <a:endParaRPr lang="en-US"/>
           </a:p>
         </p:txBody>
       </p:sp>
@@ -1316,38 +1305,37 @@
           <a:p>
             <a:pPr lvl="0"/>
             <a:r>
-              <a:rPr lang="en-US" smtClean="0"/>
+              <a:rPr lang="en-US"/>
               <a:t>Click to edit Master text styles</a:t>
             </a:r>
           </a:p>
           <a:p>
             <a:pPr lvl="1"/>
             <a:r>
-              <a:rPr lang="en-US" smtClean="0"/>
+              <a:rPr lang="en-US"/>
               <a:t>Second level</a:t>
             </a:r>
           </a:p>
           <a:p>
             <a:pPr lvl="2"/>
             <a:r>
-              <a:rPr lang="en-US" smtClean="0"/>
+              <a:rPr lang="en-US"/>
               <a:t>Third level</a:t>
             </a:r>
           </a:p>
           <a:p>
             <a:pPr lvl="3"/>
             <a:r>
-              <a:rPr lang="en-US" smtClean="0"/>
+              <a:rPr lang="en-US"/>
               <a:t>Fourth level</a:t>
             </a:r>
           </a:p>
           <a:p>
             <a:pPr lvl="4"/>
             <a:r>
-              <a:rPr lang="en-US" smtClean="0"/>
+              <a:rPr lang="en-US"/>
               <a:t>Fifth level</a:t>
             </a:r>
-            <a:endParaRPr lang="en-US"/>
           </a:p>
         </p:txBody>
       </p:sp>
@@ -1466,10 +1454,9 @@
           </a:lstStyle>
           <a:p>
             <a:r>
-              <a:rPr lang="en-US" smtClean="0"/>
+              <a:rPr lang="en-US"/>
               <a:t>Click to edit Master title style</a:t>
             </a:r>
-            <a:endParaRPr lang="en-US"/>
           </a:p>
         </p:txBody>
       </p:sp>
@@ -1532,7 +1519,7 @@
           <a:p>
             <a:pPr lvl="0"/>
             <a:r>
-              <a:rPr lang="en-US" smtClean="0"/>
+              <a:rPr lang="en-US"/>
               <a:t>Click to edit Master text styles</a:t>
             </a:r>
           </a:p>
@@ -1588,38 +1575,37 @@
           <a:p>
             <a:pPr lvl="0"/>
             <a:r>
-              <a:rPr lang="en-US" smtClean="0"/>
+              <a:rPr lang="en-US"/>
               <a:t>Click to edit Master text styles</a:t>
             </a:r>
           </a:p>
           <a:p>
             <a:pPr lvl="1"/>
             <a:r>
-              <a:rPr lang="en-US" smtClean="0"/>
+              <a:rPr lang="en-US"/>
               <a:t>Second level</a:t>
             </a:r>
           </a:p>
           <a:p>
             <a:pPr lvl="2"/>
             <a:r>
-              <a:rPr lang="en-US" smtClean="0"/>
+              <a:rPr lang="en-US"/>
               <a:t>Third level</a:t>
             </a:r>
           </a:p>
           <a:p>
             <a:pPr lvl="3"/>
             <a:r>
-              <a:rPr lang="en-US" smtClean="0"/>
+              <a:rPr lang="en-US"/>
               <a:t>Fourth level</a:t>
             </a:r>
           </a:p>
           <a:p>
             <a:pPr lvl="4"/>
             <a:r>
-              <a:rPr lang="en-US" smtClean="0"/>
+              <a:rPr lang="en-US"/>
               <a:t>Fifth level</a:t>
             </a:r>
-            <a:endParaRPr lang="en-US"/>
           </a:p>
         </p:txBody>
       </p:sp>
@@ -1682,7 +1668,7 @@
           <a:p>
             <a:pPr lvl="0"/>
             <a:r>
-              <a:rPr lang="en-US" smtClean="0"/>
+              <a:rPr lang="en-US"/>
               <a:t>Click to edit Master text styles</a:t>
             </a:r>
           </a:p>
@@ -1738,38 +1724,37 @@
           <a:p>
             <a:pPr lvl="0"/>
             <a:r>
-              <a:rPr lang="en-US" smtClean="0"/>
+              <a:rPr lang="en-US"/>
               <a:t>Click to edit Master text styles</a:t>
             </a:r>
           </a:p>
           <a:p>
             <a:pPr lvl="1"/>
             <a:r>
-              <a:rPr lang="en-US" smtClean="0"/>
+              <a:rPr lang="en-US"/>
               <a:t>Second level</a:t>
             </a:r>
           </a:p>
           <a:p>
             <a:pPr lvl="2"/>
             <a:r>
-              <a:rPr lang="en-US" smtClean="0"/>
+              <a:rPr lang="en-US"/>
               <a:t>Third level</a:t>
             </a:r>
           </a:p>
           <a:p>
             <a:pPr lvl="3"/>
             <a:r>
-              <a:rPr lang="en-US" smtClean="0"/>
+              <a:rPr lang="en-US"/>
               <a:t>Fourth level</a:t>
             </a:r>
           </a:p>
           <a:p>
             <a:pPr lvl="4"/>
             <a:r>
-              <a:rPr lang="en-US" smtClean="0"/>
+              <a:rPr lang="en-US"/>
               <a:t>Fifth level</a:t>
             </a:r>
-            <a:endParaRPr lang="en-US"/>
           </a:p>
         </p:txBody>
       </p:sp>
@@ -1884,10 +1869,9 @@
           <a:lstStyle/>
           <a:p>
             <a:r>
-              <a:rPr lang="en-US" smtClean="0"/>
+              <a:rPr lang="en-US"/>
               <a:t>Click to edit Master title style</a:t>
             </a:r>
-            <a:endParaRPr lang="en-US"/>
           </a:p>
         </p:txBody>
       </p:sp>
@@ -2106,10 +2090,9 @@
           </a:lstStyle>
           <a:p>
             <a:r>
-              <a:rPr lang="en-US" smtClean="0"/>
+              <a:rPr lang="en-US"/>
               <a:t>Click to edit Master title style</a:t>
             </a:r>
-            <a:endParaRPr lang="en-US"/>
           </a:p>
         </p:txBody>
       </p:sp>
@@ -2163,38 +2146,37 @@
           <a:p>
             <a:pPr lvl="0"/>
             <a:r>
-              <a:rPr lang="en-US" smtClean="0"/>
+              <a:rPr lang="en-US"/>
               <a:t>Click to edit Master text styles</a:t>
             </a:r>
           </a:p>
           <a:p>
             <a:pPr lvl="1"/>
             <a:r>
-              <a:rPr lang="en-US" smtClean="0"/>
+              <a:rPr lang="en-US"/>
               <a:t>Second level</a:t>
             </a:r>
           </a:p>
           <a:p>
             <a:pPr lvl="2"/>
             <a:r>
-              <a:rPr lang="en-US" smtClean="0"/>
+              <a:rPr lang="en-US"/>
               <a:t>Third level</a:t>
             </a:r>
           </a:p>
           <a:p>
             <a:pPr lvl="3"/>
             <a:r>
-              <a:rPr lang="en-US" smtClean="0"/>
+              <a:rPr lang="en-US"/>
               <a:t>Fourth level</a:t>
             </a:r>
           </a:p>
           <a:p>
             <a:pPr lvl="4"/>
             <a:r>
-              <a:rPr lang="en-US" smtClean="0"/>
+              <a:rPr lang="en-US"/>
               <a:t>Fifth level</a:t>
             </a:r>
-            <a:endParaRPr lang="en-US"/>
           </a:p>
         </p:txBody>
       </p:sp>
@@ -2257,7 +2239,7 @@
           <a:p>
             <a:pPr lvl="0"/>
             <a:r>
-              <a:rPr lang="en-US" smtClean="0"/>
+              <a:rPr lang="en-US"/>
               <a:t>Click to edit Master text styles</a:t>
             </a:r>
           </a:p>
@@ -2383,10 +2365,9 @@
           </a:lstStyle>
           <a:p>
             <a:r>
-              <a:rPr lang="en-US" smtClean="0"/>
+              <a:rPr lang="en-US"/>
               <a:t>Click to edit Master title style</a:t>
             </a:r>
-            <a:endParaRPr lang="en-US"/>
           </a:p>
         </p:txBody>
       </p:sp>
@@ -2510,7 +2491,7 @@
           <a:p>
             <a:pPr lvl="0"/>
             <a:r>
-              <a:rPr lang="en-US" smtClean="0"/>
+              <a:rPr lang="en-US"/>
               <a:t>Click to edit Master text styles</a:t>
             </a:r>
           </a:p>
@@ -2598,9 +2579,39 @@
 <p:sldMaster xmlns:a="http://schemas.openxmlformats.org/drawingml/2006/main" xmlns:r="http://schemas.openxmlformats.org/officeDocument/2006/relationships" xmlns:p="http://schemas.openxmlformats.org/presentationml/2006/main">
   <p:cSld>
     <p:bg>
-      <p:bgRef idx="1001">
-        <a:schemeClr val="bg1"/>
-      </p:bgRef>
+      <p:bgPr>
+        <a:gradFill flip="none" rotWithShape="1">
+          <a:gsLst>
+            <a:gs pos="0">
+              <a:schemeClr val="accent1">
+                <a:lumMod val="5000"/>
+                <a:lumOff val="95000"/>
+              </a:schemeClr>
+            </a:gs>
+            <a:gs pos="74000">
+              <a:schemeClr val="accent1">
+                <a:lumMod val="45000"/>
+                <a:lumOff val="55000"/>
+              </a:schemeClr>
+            </a:gs>
+            <a:gs pos="83000">
+              <a:schemeClr val="accent1">
+                <a:lumMod val="45000"/>
+                <a:lumOff val="55000"/>
+              </a:schemeClr>
+            </a:gs>
+            <a:gs pos="100000">
+              <a:schemeClr val="accent1">
+                <a:lumMod val="30000"/>
+                <a:lumOff val="70000"/>
+              </a:schemeClr>
+            </a:gs>
+          </a:gsLst>
+          <a:lin ang="5400000" scaled="1"/>
+          <a:tileRect/>
+        </a:gradFill>
+        <a:effectLst/>
+      </p:bgPr>
     </p:bg>
     <p:spTree>
       <p:nvGrpSpPr>
@@ -2642,10 +2653,9 @@
           <a:lstStyle/>
           <a:p>
             <a:r>
-              <a:rPr lang="en-US" smtClean="0"/>
+              <a:rPr lang="en-US"/>
               <a:t>Click to edit Master title style</a:t>
             </a:r>
-            <a:endParaRPr lang="en-US"/>
           </a:p>
         </p:txBody>
       </p:sp>
@@ -2676,38 +2686,37 @@
           <a:p>
             <a:pPr lvl="0"/>
             <a:r>
-              <a:rPr lang="en-US" smtClean="0"/>
+              <a:rPr lang="en-US"/>
               <a:t>Click to edit Master text styles</a:t>
             </a:r>
           </a:p>
           <a:p>
             <a:pPr lvl="1"/>
             <a:r>
-              <a:rPr lang="en-US" smtClean="0"/>
+              <a:rPr lang="en-US"/>
               <a:t>Second level</a:t>
             </a:r>
           </a:p>
           <a:p>
             <a:pPr lvl="2"/>
             <a:r>
-              <a:rPr lang="en-US" smtClean="0"/>
+              <a:rPr lang="en-US"/>
               <a:t>Third level</a:t>
             </a:r>
           </a:p>
           <a:p>
             <a:pPr lvl="3"/>
             <a:r>
-              <a:rPr lang="en-US" smtClean="0"/>
+              <a:rPr lang="en-US"/>
               <a:t>Fourth level</a:t>
             </a:r>
           </a:p>
           <a:p>
             <a:pPr lvl="4"/>
             <a:r>
-              <a:rPr lang="en-US" smtClean="0"/>
+              <a:rPr lang="en-US"/>
               <a:t>Fifth level</a:t>
             </a:r>
-            <a:endParaRPr lang="en-US"/>
           </a:p>
         </p:txBody>
       </p:sp>
@@ -3107,14 +3116,6 @@
 <file path=ppt/slides/slide1.xml><?xml version="1.0" encoding="utf-8"?>
 <p:sld xmlns:a="http://schemas.openxmlformats.org/drawingml/2006/main" xmlns:r="http://schemas.openxmlformats.org/officeDocument/2006/relationships" xmlns:p="http://schemas.openxmlformats.org/presentationml/2006/main">
   <p:cSld>
-    <p:bg>
-      <p:bgPr>
-        <a:solidFill>
-          <a:srgbClr val="FFFFFF"/>
-        </a:solidFill>
-        <a:effectLst/>
-      </p:bgPr>
-    </p:bg>
     <p:spTree>
       <p:nvGrpSpPr>
         <p:cNvPr id="1" name=""/>
@@ -3157,22 +3158,13 @@
               </a:lnSpc>
             </a:pPr>
             <a:r>
-              <a:rPr sz="3900" b="1" i="0" u="none" dirty="0" smtClean="0">
+              <a:rPr sz="3900" b="1" i="0" u="none" dirty="0">
                 <a:solidFill>
                   <a:srgbClr val="1F3A5F"/>
                 </a:solidFill>
                 <a:latin typeface="Inter"/>
               </a:rPr>
-              <a:t>Road </a:t>
-            </a:r>
-            <a:r>
-              <a:rPr sz="3900" b="1" i="0" u="none" dirty="0">
-                <a:solidFill>
-                  <a:srgbClr val="1F3A5F"/>
-                </a:solidFill>
-                <a:latin typeface="Inter"/>
-              </a:rPr>
-              <a:t>Accident Intelligence Dashboard</a:t>
+              <a:t>Road Accident Intelligence Dashboard</a:t>
             </a:r>
           </a:p>
         </p:txBody>
@@ -3297,7 +3289,7 @@
         <p:spPr>
           <a:xfrm>
             <a:off x="933450" y="5604569"/>
-            <a:ext cx="4924425" cy="243780"/>
+            <a:ext cx="4924425" cy="243656"/>
           </a:xfrm>
           <a:prstGeom prst="rect">
             <a:avLst/>
@@ -3316,7 +3308,7 @@
               </a:lnSpc>
             </a:pPr>
             <a:r>
-              <a:rPr sz="1200" b="1" i="0" u="none">
+              <a:rPr b="1" i="0" u="none">
                 <a:solidFill>
                   <a:srgbClr val="1F3A5F"/>
                 </a:solidFill>
@@ -3355,7 +3347,7 @@
               </a:lnSpc>
             </a:pPr>
             <a:r>
-              <a:rPr lang="en-IN" sz="1125" dirty="0" err="1" smtClean="0">
+              <a:rPr lang="en-IN" sz="1600" dirty="0" err="1">
                 <a:solidFill>
                   <a:srgbClr val="475569"/>
                 </a:solidFill>
@@ -3364,7 +3356,7 @@
               <a:t>Md</a:t>
             </a:r>
             <a:r>
-              <a:rPr lang="en-IN" sz="1125" dirty="0" smtClean="0">
+              <a:rPr lang="en-IN" sz="1600" dirty="0">
                 <a:solidFill>
                   <a:srgbClr val="475569"/>
                 </a:solidFill>
@@ -3373,7 +3365,7 @@
               <a:t> </a:t>
             </a:r>
             <a:r>
-              <a:rPr lang="en-IN" sz="1125" dirty="0" err="1" smtClean="0">
+              <a:rPr lang="en-IN" sz="1600" dirty="0" err="1">
                 <a:solidFill>
                   <a:srgbClr val="475569"/>
                 </a:solidFill>
@@ -3381,7 +3373,7 @@
               </a:rPr>
               <a:t>Zahid</a:t>
             </a:r>
-            <a:endParaRPr lang="en-IN" sz="1125" dirty="0" smtClean="0">
+            <a:endParaRPr lang="en-IN" sz="1600" dirty="0">
               <a:solidFill>
                 <a:srgbClr val="475569"/>
               </a:solidFill>
@@ -3395,7 +3387,7 @@
               </a:lnSpc>
             </a:pPr>
             <a:r>
-              <a:rPr lang="en-IN" sz="1125" dirty="0" err="1" smtClean="0">
+              <a:rPr lang="en-IN" sz="1600" dirty="0" err="1">
                 <a:solidFill>
                   <a:srgbClr val="475569"/>
                 </a:solidFill>
@@ -3404,7 +3396,7 @@
               <a:t>Ramtanay</a:t>
             </a:r>
             <a:r>
-              <a:rPr lang="en-IN" sz="1125" dirty="0" smtClean="0">
+              <a:rPr lang="en-IN" sz="1600" dirty="0">
                 <a:solidFill>
                   <a:srgbClr val="475569"/>
                 </a:solidFill>
@@ -3413,7 +3405,7 @@
               <a:t> </a:t>
             </a:r>
             <a:r>
-              <a:rPr lang="en-IN" sz="1125" dirty="0" err="1" smtClean="0">
+              <a:rPr lang="en-IN" sz="1600" dirty="0" err="1">
                 <a:solidFill>
                   <a:srgbClr val="475569"/>
                 </a:solidFill>
@@ -3421,7 +3413,7 @@
               </a:rPr>
               <a:t>Chakraborty</a:t>
             </a:r>
-            <a:endParaRPr lang="en-IN" sz="1125" dirty="0" smtClean="0">
+            <a:endParaRPr lang="en-IN" sz="1600" dirty="0">
               <a:solidFill>
                 <a:srgbClr val="475569"/>
               </a:solidFill>
@@ -3435,7 +3427,7 @@
               </a:lnSpc>
             </a:pPr>
             <a:r>
-              <a:rPr lang="en-IN" sz="1125" b="0" i="0" u="none" dirty="0" smtClean="0">
+              <a:rPr lang="en-IN" sz="1600" b="0" i="0" u="none" dirty="0">
                 <a:solidFill>
                   <a:srgbClr val="475569"/>
                 </a:solidFill>
@@ -3550,14 +3542,6 @@
 <file path=ppt/slides/slide10.xml><?xml version="1.0" encoding="utf-8"?>
 <p:sld xmlns:a="http://schemas.openxmlformats.org/drawingml/2006/main" xmlns:r="http://schemas.openxmlformats.org/officeDocument/2006/relationships" xmlns:p="http://schemas.openxmlformats.org/presentationml/2006/main">
   <p:cSld>
-    <p:bg>
-      <p:bgPr>
-        <a:solidFill>
-          <a:srgbClr val="FFFFFF"/>
-        </a:solidFill>
-        <a:effectLst/>
-      </p:bgPr>
-    </p:bg>
     <p:spTree>
       <p:nvGrpSpPr>
         <p:cNvPr id="1" name=""/>
@@ -4094,30 +4078,6 @@
           <a:chExt cx="0" cy="0"/>
         </a:xfrm>
       </p:grpSpPr>
-      <p:pic>
-        <p:nvPicPr>
-          <p:cNvPr id="2" name="Picture 1" descr="image.png"/>
-          <p:cNvPicPr>
-            <a:picLocks noChangeAspect="1"/>
-          </p:cNvPicPr>
-          <p:nvPr/>
-        </p:nvPicPr>
-        <p:blipFill>
-          <a:blip r:embed="rId2"/>
-          <a:stretch>
-            <a:fillRect/>
-          </a:stretch>
-        </p:blipFill>
-        <p:spPr>
-          <a:xfrm>
-            <a:off x="0" y="-26376"/>
-            <a:ext cx="12192000" cy="6858000"/>
-          </a:xfrm>
-          <a:prstGeom prst="rect">
-            <a:avLst/>
-          </a:prstGeom>
-        </p:spPr>
-      </p:pic>
       <p:sp>
         <p:nvSpPr>
           <p:cNvPr id="3" name="TextBox 2"/>
@@ -4162,7 +4122,7 @@
         <p:spPr>
           <a:xfrm>
             <a:off x="571500" y="2788890"/>
-            <a:ext cx="11049000" cy="396180"/>
+            <a:ext cx="11049000" cy="364139"/>
           </a:xfrm>
           <a:prstGeom prst="rect">
             <a:avLst/>
@@ -4181,9 +4141,9 @@
               </a:lnSpc>
             </a:pPr>
             <a:r>
-              <a:rPr sz="1950" b="0" i="0" u="none">
-                <a:solidFill>
-                  <a:srgbClr val="F4A300"/>
+              <a:rPr sz="1950" b="0" i="0" u="none" dirty="0">
+                <a:solidFill>
+                  <a:srgbClr val="002060"/>
                 </a:solidFill>
                 <a:latin typeface="Inter Medium"/>
               </a:rPr>
@@ -4207,7 +4167,7 @@
             <a:avLst/>
           </a:prstGeom>
           <a:solidFill>
-            <a:srgbClr val="F4A300"/>
+            <a:srgbClr val="002060"/>
           </a:solidFill>
           <a:ln>
             <a:noFill/>
@@ -4246,7 +4206,7 @@
           <p:nvPr/>
         </p:nvPicPr>
         <p:blipFill>
-          <a:blip r:embed="rId3"/>
+          <a:blip r:embed="rId2"/>
           <a:stretch>
             <a:fillRect/>
           </a:stretch>
@@ -4272,14 +4232,6 @@
 <file path=ppt/slides/slide2.xml><?xml version="1.0" encoding="utf-8"?>
 <p:sld xmlns:a="http://schemas.openxmlformats.org/drawingml/2006/main" xmlns:r="http://schemas.openxmlformats.org/officeDocument/2006/relationships" xmlns:p="http://schemas.openxmlformats.org/presentationml/2006/main">
   <p:cSld>
-    <p:bg>
-      <p:bgPr>
-        <a:solidFill>
-          <a:srgbClr val="FFFFFF"/>
-        </a:solidFill>
-        <a:effectLst/>
-      </p:bgPr>
-    </p:bg>
     <p:spTree>
       <p:nvGrpSpPr>
         <p:cNvPr id="1" name=""/>
@@ -4952,14 +4904,6 @@
 <file path=ppt/slides/slide3.xml><?xml version="1.0" encoding="utf-8"?>
 <p:sld xmlns:a="http://schemas.openxmlformats.org/drawingml/2006/main" xmlns:r="http://schemas.openxmlformats.org/officeDocument/2006/relationships" xmlns:p="http://schemas.openxmlformats.org/presentationml/2006/main">
   <p:cSld>
-    <p:bg>
-      <p:bgPr>
-        <a:solidFill>
-          <a:srgbClr val="FFFFFF"/>
-        </a:solidFill>
-        <a:effectLst/>
-      </p:bgPr>
-    </p:bg>
     <p:spTree>
       <p:nvGrpSpPr>
         <p:cNvPr id="1" name=""/>
@@ -5085,7 +5029,7 @@
             <a:avLst/>
           </a:prstGeom>
           <a:solidFill>
-            <a:srgbClr val="CBD5E1"/>
+            <a:srgbClr val="0070C0"/>
           </a:solidFill>
           <a:ln>
             <a:noFill/>
@@ -5524,7 +5468,7 @@
             </a:avLst>
           </a:prstGeom>
           <a:solidFill>
-            <a:srgbClr val="F4A300"/>
+            <a:srgbClr val="002060"/>
           </a:solidFill>
           <a:ln w="38100">
             <a:solidFill>
@@ -5573,7 +5517,7 @@
             </a:avLst>
           </a:prstGeom>
           <a:solidFill>
-            <a:srgbClr val="F4A300"/>
+            <a:srgbClr val="002060"/>
           </a:solidFill>
           <a:ln w="38100">
             <a:solidFill>
@@ -5622,7 +5566,7 @@
             </a:avLst>
           </a:prstGeom>
           <a:solidFill>
-            <a:srgbClr val="F4A300"/>
+            <a:srgbClr val="002060"/>
           </a:solidFill>
           <a:ln w="38100">
             <a:solidFill>
@@ -5671,7 +5615,7 @@
             </a:avLst>
           </a:prstGeom>
           <a:solidFill>
-            <a:srgbClr val="F4A300"/>
+            <a:srgbClr val="002060"/>
           </a:solidFill>
           <a:ln w="38100">
             <a:solidFill>
@@ -5773,14 +5717,6 @@
 <file path=ppt/slides/slide4.xml><?xml version="1.0" encoding="utf-8"?>
 <p:sld xmlns:a="http://schemas.openxmlformats.org/drawingml/2006/main" xmlns:r="http://schemas.openxmlformats.org/officeDocument/2006/relationships" xmlns:p="http://schemas.openxmlformats.org/presentationml/2006/main">
   <p:cSld>
-    <p:bg>
-      <p:bgPr>
-        <a:solidFill>
-          <a:srgbClr val="FFFFFF"/>
-        </a:solidFill>
-        <a:effectLst/>
-      </p:bgPr>
-    </p:bg>
     <p:spTree>
       <p:nvGrpSpPr>
         <p:cNvPr id="1" name=""/>
@@ -6449,14 +6385,6 @@
 <file path=ppt/slides/slide5.xml><?xml version="1.0" encoding="utf-8"?>
 <p:sld xmlns:a="http://schemas.openxmlformats.org/drawingml/2006/main" xmlns:r="http://schemas.openxmlformats.org/officeDocument/2006/relationships" xmlns:p="http://schemas.openxmlformats.org/presentationml/2006/main">
   <p:cSld>
-    <p:bg>
-      <p:bgPr>
-        <a:solidFill>
-          <a:srgbClr val="FFFFFF"/>
-        </a:solidFill>
-        <a:effectLst/>
-      </p:bgPr>
-    </p:bg>
     <p:spTree>
       <p:nvGrpSpPr>
         <p:cNvPr id="1" name=""/>
@@ -7139,14 +7067,6 @@
 <file path=ppt/slides/slide6.xml><?xml version="1.0" encoding="utf-8"?>
 <p:sld xmlns:a="http://schemas.openxmlformats.org/drawingml/2006/main" xmlns:r="http://schemas.openxmlformats.org/officeDocument/2006/relationships" xmlns:p="http://schemas.openxmlformats.org/presentationml/2006/main">
   <p:cSld>
-    <p:bg>
-      <p:bgPr>
-        <a:solidFill>
-          <a:srgbClr val="FFFFFF"/>
-        </a:solidFill>
-        <a:effectLst/>
-      </p:bgPr>
-    </p:bg>
     <p:spTree>
       <p:nvGrpSpPr>
         <p:cNvPr id="1" name=""/>
@@ -7829,14 +7749,6 @@
 <file path=ppt/slides/slide7.xml><?xml version="1.0" encoding="utf-8"?>
 <p:sld xmlns:a="http://schemas.openxmlformats.org/drawingml/2006/main" xmlns:r="http://schemas.openxmlformats.org/officeDocument/2006/relationships" xmlns:p="http://schemas.openxmlformats.org/presentationml/2006/main">
   <p:cSld>
-    <p:bg>
-      <p:bgPr>
-        <a:solidFill>
-          <a:srgbClr val="FFFFFF"/>
-        </a:solidFill>
-        <a:effectLst/>
-      </p:bgPr>
-    </p:bg>
     <p:spTree>
       <p:nvGrpSpPr>
         <p:cNvPr id="1" name=""/>
@@ -8464,7 +8376,7 @@
           <a:lstStyle/>
           <a:p>
             <a:r>
-              <a:rPr lang="en-IN" dirty="0" smtClean="0">
+              <a:rPr lang="en-IN" dirty="0">
                 <a:solidFill>
                   <a:schemeClr val="accent6"/>
                 </a:solidFill>
@@ -8474,7 +8386,7 @@
               <a:t>Fatal Accident Rate </a:t>
             </a:r>
             <a:r>
-              <a:rPr lang="en-IN" dirty="0" smtClean="0">
+              <a:rPr lang="en-IN" dirty="0">
                 <a:solidFill>
                   <a:schemeClr val="bg1"/>
                 </a:solidFill>
@@ -8484,7 +8396,7 @@
               <a:t>=</a:t>
             </a:r>
             <a:r>
-              <a:rPr lang="en-IN" dirty="0" smtClean="0">
+              <a:rPr lang="en-IN" dirty="0">
                 <a:solidFill>
                   <a:schemeClr val="accent6"/>
                 </a:solidFill>
@@ -8494,7 +8406,7 @@
               <a:t> </a:t>
             </a:r>
             <a:r>
-              <a:rPr lang="en-IN" dirty="0" smtClean="0">
+              <a:rPr lang="en-IN" dirty="0">
                 <a:solidFill>
                   <a:srgbClr val="00B0F0"/>
                 </a:solidFill>
@@ -8504,7 +8416,7 @@
               <a:t>DIVIDE</a:t>
             </a:r>
             <a:r>
-              <a:rPr lang="en-IN" dirty="0" smtClean="0">
+              <a:rPr lang="en-IN" dirty="0">
                 <a:solidFill>
                   <a:schemeClr val="bg1"/>
                 </a:solidFill>
@@ -8513,13 +8425,6 @@
               </a:rPr>
               <a:t>([fatal],[Total_Accidents],0)</a:t>
             </a:r>
-            <a:endParaRPr lang="en-IN" dirty="0">
-              <a:solidFill>
-                <a:schemeClr val="bg1"/>
-              </a:solidFill>
-              <a:latin typeface="Aparajita" panose="02020603050405020304" pitchFamily="18" charset="0"/>
-              <a:cs typeface="Aparajita" panose="02020603050405020304" pitchFamily="18" charset="0"/>
-            </a:endParaRPr>
           </a:p>
         </p:txBody>
       </p:sp>
@@ -8546,7 +8451,7 @@
           <a:lstStyle/>
           <a:p>
             <a:r>
-              <a:rPr lang="en-IN" dirty="0" smtClean="0">
+              <a:rPr lang="en-IN" dirty="0">
                 <a:solidFill>
                   <a:schemeClr val="accent6"/>
                 </a:solidFill>
@@ -8556,7 +8461,7 @@
               <a:t>Total_Accidents </a:t>
             </a:r>
             <a:r>
-              <a:rPr lang="en-IN" dirty="0" smtClean="0">
+              <a:rPr lang="en-IN" dirty="0">
                 <a:solidFill>
                   <a:schemeClr val="bg1"/>
                 </a:solidFill>
@@ -8566,7 +8471,7 @@
               <a:t>=</a:t>
             </a:r>
             <a:r>
-              <a:rPr lang="en-IN" dirty="0" smtClean="0">
+              <a:rPr lang="en-IN" dirty="0">
                 <a:solidFill>
                   <a:schemeClr val="accent6"/>
                 </a:solidFill>
@@ -8576,7 +8481,7 @@
               <a:t> </a:t>
             </a:r>
             <a:r>
-              <a:rPr lang="en-IN" dirty="0" smtClean="0">
+              <a:rPr lang="en-IN" dirty="0">
                 <a:solidFill>
                   <a:srgbClr val="00B0F0"/>
                 </a:solidFill>
@@ -8586,7 +8491,7 @@
               <a:t>CALCULATE</a:t>
             </a:r>
             <a:r>
-              <a:rPr lang="en-IN" dirty="0" smtClean="0">
+              <a:rPr lang="en-IN" dirty="0">
                 <a:solidFill>
                   <a:schemeClr val="bg1"/>
                 </a:solidFill>
@@ -8596,7 +8501,7 @@
               <a:t>(</a:t>
             </a:r>
             <a:r>
-              <a:rPr lang="en-IN" dirty="0" smtClean="0">
+              <a:rPr lang="en-IN" dirty="0">
                 <a:solidFill>
                   <a:srgbClr val="00B0F0"/>
                 </a:solidFill>
@@ -8606,7 +8511,7 @@
               <a:t>COUNT</a:t>
             </a:r>
             <a:r>
-              <a:rPr lang="en-IN" dirty="0" smtClean="0">
+              <a:rPr lang="en-IN" dirty="0">
                 <a:solidFill>
                   <a:schemeClr val="bg1"/>
                 </a:solidFill>
@@ -8615,13 +8520,6 @@
               </a:rPr>
               <a:t>(‘Road Accident Data’ [Accident_Index]))</a:t>
             </a:r>
-            <a:endParaRPr lang="en-IN" dirty="0">
-              <a:solidFill>
-                <a:schemeClr val="bg1"/>
-              </a:solidFill>
-              <a:latin typeface="Aparajita" panose="02020603050405020304" pitchFamily="18" charset="0"/>
-              <a:cs typeface="Aparajita" panose="02020603050405020304" pitchFamily="18" charset="0"/>
-            </a:endParaRPr>
           </a:p>
         </p:txBody>
       </p:sp>
@@ -8648,7 +8546,7 @@
           <a:lstStyle/>
           <a:p>
             <a:r>
-              <a:rPr lang="en-IN" dirty="0" smtClean="0">
+              <a:rPr lang="en-IN" dirty="0">
                 <a:solidFill>
                   <a:schemeClr val="accent6"/>
                 </a:solidFill>
@@ -8658,7 +8556,7 @@
               <a:t>Total_Casualties </a:t>
             </a:r>
             <a:r>
-              <a:rPr lang="en-IN" dirty="0" smtClean="0">
+              <a:rPr lang="en-IN" dirty="0">
                 <a:solidFill>
                   <a:schemeClr val="bg1"/>
                 </a:solidFill>
@@ -8668,7 +8566,7 @@
               <a:t>=</a:t>
             </a:r>
             <a:r>
-              <a:rPr lang="en-IN" dirty="0" smtClean="0">
+              <a:rPr lang="en-IN" dirty="0">
                 <a:solidFill>
                   <a:schemeClr val="accent6"/>
                 </a:solidFill>
@@ -8678,7 +8576,7 @@
               <a:t> </a:t>
             </a:r>
             <a:r>
-              <a:rPr lang="en-IN" dirty="0" smtClean="0">
+              <a:rPr lang="en-IN" dirty="0">
                 <a:solidFill>
                   <a:srgbClr val="00B0F0"/>
                 </a:solidFill>
@@ -8688,7 +8586,7 @@
               <a:t>CALCULATE</a:t>
             </a:r>
             <a:r>
-              <a:rPr lang="en-IN" dirty="0" smtClean="0">
+              <a:rPr lang="en-IN" dirty="0">
                 <a:solidFill>
                   <a:schemeClr val="bg1"/>
                 </a:solidFill>
@@ -8698,7 +8596,7 @@
               <a:t>(</a:t>
             </a:r>
             <a:r>
-              <a:rPr lang="en-IN" dirty="0" smtClean="0">
+              <a:rPr lang="en-IN" dirty="0">
                 <a:solidFill>
                   <a:srgbClr val="00B0F0"/>
                 </a:solidFill>
@@ -8708,7 +8606,7 @@
               <a:t>SUM</a:t>
             </a:r>
             <a:r>
-              <a:rPr lang="en-IN" dirty="0" smtClean="0">
+              <a:rPr lang="en-IN" dirty="0">
                 <a:solidFill>
                   <a:schemeClr val="bg1"/>
                 </a:solidFill>
@@ -8717,13 +8615,6 @@
               </a:rPr>
               <a:t>(‘Road Accident Data’ [Number_of_Casualties]))</a:t>
             </a:r>
-            <a:endParaRPr lang="en-IN" dirty="0">
-              <a:solidFill>
-                <a:schemeClr val="bg1"/>
-              </a:solidFill>
-              <a:latin typeface="Aparajita" panose="02020603050405020304" pitchFamily="18" charset="0"/>
-              <a:cs typeface="Aparajita" panose="02020603050405020304" pitchFamily="18" charset="0"/>
-            </a:endParaRPr>
           </a:p>
         </p:txBody>
       </p:sp>
@@ -8762,14 +8653,6 @@
 <file path=ppt/slides/slide8.xml><?xml version="1.0" encoding="utf-8"?>
 <p:sld xmlns:a="http://schemas.openxmlformats.org/drawingml/2006/main" xmlns:r="http://schemas.openxmlformats.org/officeDocument/2006/relationships" xmlns:p="http://schemas.openxmlformats.org/presentationml/2006/main">
   <p:cSld>
-    <p:bg>
-      <p:bgPr>
-        <a:solidFill>
-          <a:srgbClr val="FFFFFF"/>
-        </a:solidFill>
-        <a:effectLst/>
-      </p:bgPr>
-    </p:bg>
     <p:spTree>
       <p:nvGrpSpPr>
         <p:cNvPr id="1" name=""/>
@@ -9850,14 +9733,6 @@
 <file path=ppt/slides/slide9.xml><?xml version="1.0" encoding="utf-8"?>
 <p:sld xmlns:a="http://schemas.openxmlformats.org/drawingml/2006/main" xmlns:r="http://schemas.openxmlformats.org/officeDocument/2006/relationships" xmlns:p="http://schemas.openxmlformats.org/presentationml/2006/main">
   <p:cSld>
-    <p:bg>
-      <p:bgPr>
-        <a:solidFill>
-          <a:srgbClr val="FFFFFF"/>
-        </a:solidFill>
-        <a:effectLst/>
-      </p:bgPr>
-    </p:bg>
     <p:spTree>
       <p:nvGrpSpPr>
         <p:cNvPr id="1" name=""/>
